--- a/chapter4/parts/part-02-text-and-image-annotation/clip.pptx
+++ b/chapter4/parts/part-02-text-and-image-annotation/clip.pptx
@@ -4242,7 +4242,7 @@
               </a:defRPr>
             </a:pPr>
             <a:r>
-              <a:t>Chapter 4 — 02 Text And Image Annotation</a:t>
+              <a:t>Chapter 4 — Text And Image Annotation</a:t>
             </a:r>
           </a:p>
         </p:txBody>
@@ -4401,7 +4401,7 @@
               </a:defRPr>
             </a:pPr>
             <a:r>
-              <a:t>Chapter 4 — 02 Text And Image Annotation</a:t>
+              <a:t>Chapter 4 — Text And Image Annotation</a:t>
             </a:r>
           </a:p>
         </p:txBody>
@@ -4580,7 +4580,7 @@
               </a:defRPr>
             </a:pPr>
             <a:r>
-              <a:t>Chapter 4 — 02 Text And Image Annotation</a:t>
+              <a:t>Chapter 4 — Text And Image Annotation</a:t>
             </a:r>
           </a:p>
         </p:txBody>
@@ -4819,7 +4819,7 @@
               </a:defRPr>
             </a:pPr>
             <a:r>
-              <a:t>Chapter 4 — 02 Text And Image Annotation</a:t>
+              <a:t>Chapter 4 — Text And Image Annotation</a:t>
             </a:r>
           </a:p>
         </p:txBody>
@@ -5058,7 +5058,7 @@
               </a:defRPr>
             </a:pPr>
             <a:r>
-              <a:t>Chapter 4 — 02 Text And Image Annotation</a:t>
+              <a:t>Chapter 4 — Text And Image Annotation</a:t>
             </a:r>
           </a:p>
         </p:txBody>
@@ -5297,7 +5297,7 @@
               </a:defRPr>
             </a:pPr>
             <a:r>
-              <a:t>Chapter 4 — 02 Text And Image Annotation</a:t>
+              <a:t>Chapter 4 — Text And Image Annotation</a:t>
             </a:r>
           </a:p>
         </p:txBody>
@@ -5516,7 +5516,7 @@
               </a:defRPr>
             </a:pPr>
             <a:r>
-              <a:t>Chapter 4 — 02 Text And Image Annotation</a:t>
+              <a:t>Chapter 4 — Text And Image Annotation</a:t>
             </a:r>
           </a:p>
         </p:txBody>
@@ -5755,7 +5755,7 @@
               </a:defRPr>
             </a:pPr>
             <a:r>
-              <a:t>Chapter 4 — 02 Text And Image Annotation</a:t>
+              <a:t>Chapter 4 — Text And Image Annotation</a:t>
             </a:r>
           </a:p>
         </p:txBody>
@@ -5994,7 +5994,7 @@
               </a:defRPr>
             </a:pPr>
             <a:r>
-              <a:t>Chapter 4 — 02 Text And Image Annotation</a:t>
+              <a:t>Chapter 4 — Text And Image Annotation</a:t>
             </a:r>
           </a:p>
         </p:txBody>
@@ -6173,7 +6173,7 @@
               </a:defRPr>
             </a:pPr>
             <a:r>
-              <a:t>Chapter 4 — 02 Text And Image Annotation</a:t>
+              <a:t>Chapter 4 — Text And Image Annotation</a:t>
             </a:r>
           </a:p>
         </p:txBody>

--- a/chapter4/parts/part-02-text-and-image-annotation/clip.pptx
+++ b/chapter4/parts/part-02-text-and-image-annotation/clip.pptx
@@ -4326,10 +4326,12 @@
           </a:bodyPr>
           <a:lstStyle/>
           <a:p>
-            <a:pPr>
+            <a:pPr lvl="0" marL="457200" indent="-228600">
+              <a:buFont typeface="Calibri"/>
               <a:spcAft>
                 <a:spcPts val="1000"/>
               </a:spcAft>
+              <a:buSzPct val="100000"/>
               <a:buChar char="•"/>
               <a:lnSpc>
                 <a:spcPts val="2200"/>
@@ -4346,10 +4348,12 @@
             </a:r>
           </a:p>
           <a:p>
-            <a:pPr>
+            <a:pPr lvl="0" marL="457200" indent="-228600">
+              <a:buFont typeface="Calibri"/>
               <a:spcAft>
                 <a:spcPts val="1000"/>
               </a:spcAft>
+              <a:buSzPct val="100000"/>
               <a:buChar char="•"/>
               <a:lnSpc>
                 <a:spcPts val="2200"/>
@@ -4485,10 +4489,12 @@
           </a:bodyPr>
           <a:lstStyle/>
           <a:p>
-            <a:pPr>
+            <a:pPr lvl="0" marL="457200" indent="-228600">
+              <a:buFont typeface="Calibri"/>
               <a:spcAft>
                 <a:spcPts val="1000"/>
               </a:spcAft>
+              <a:buSzPct val="100000"/>
               <a:buChar char="•"/>
               <a:lnSpc>
                 <a:spcPts val="2200"/>
@@ -4505,10 +4511,12 @@
             </a:r>
           </a:p>
           <a:p>
-            <a:pPr>
+            <a:pPr lvl="0" marL="457200" indent="-228600">
+              <a:buFont typeface="Calibri"/>
               <a:spcAft>
                 <a:spcPts val="1000"/>
               </a:spcAft>
+              <a:buSzPct val="100000"/>
               <a:buChar char="•"/>
               <a:lnSpc>
                 <a:spcPts val="2200"/>
@@ -4525,10 +4533,12 @@
             </a:r>
           </a:p>
           <a:p>
-            <a:pPr>
+            <a:pPr lvl="0" marL="457200" indent="-228600">
+              <a:buFont typeface="Calibri"/>
               <a:spcAft>
                 <a:spcPts val="1000"/>
               </a:spcAft>
+              <a:buSzPct val="100000"/>
               <a:buChar char="•"/>
               <a:lnSpc>
                 <a:spcPts val="2200"/>
@@ -4664,10 +4674,12 @@
           </a:bodyPr>
           <a:lstStyle/>
           <a:p>
-            <a:pPr>
+            <a:pPr lvl="0" marL="457200" indent="-228600">
+              <a:buFont typeface="Calibri"/>
               <a:spcAft>
                 <a:spcPts val="1000"/>
               </a:spcAft>
+              <a:buSzPct val="100000"/>
               <a:buChar char="•"/>
               <a:lnSpc>
                 <a:spcPts val="2200"/>
@@ -4684,10 +4696,12 @@
             </a:r>
           </a:p>
           <a:p>
-            <a:pPr>
+            <a:pPr lvl="0" marL="457200" indent="-228600">
+              <a:buFont typeface="Calibri"/>
               <a:spcAft>
                 <a:spcPts val="1000"/>
               </a:spcAft>
+              <a:buSzPct val="100000"/>
               <a:buChar char="•"/>
               <a:lnSpc>
                 <a:spcPts val="2200"/>
@@ -4704,10 +4718,12 @@
             </a:r>
           </a:p>
           <a:p>
-            <a:pPr>
+            <a:pPr lvl="0" marL="457200" indent="-228600">
+              <a:buFont typeface="Calibri"/>
               <a:spcAft>
                 <a:spcPts val="1000"/>
               </a:spcAft>
+              <a:buSzPct val="100000"/>
               <a:buChar char="•"/>
               <a:lnSpc>
                 <a:spcPts val="2200"/>
@@ -4724,10 +4740,12 @@
             </a:r>
           </a:p>
           <a:p>
-            <a:pPr>
+            <a:pPr lvl="0" marL="457200" indent="-228600">
+              <a:buFont typeface="Calibri"/>
               <a:spcAft>
                 <a:spcPts val="1000"/>
               </a:spcAft>
+              <a:buSzPct val="100000"/>
               <a:buChar char="•"/>
               <a:lnSpc>
                 <a:spcPts val="2200"/>
@@ -4744,10 +4762,12 @@
             </a:r>
           </a:p>
           <a:p>
-            <a:pPr>
+            <a:pPr lvl="0" marL="457200" indent="-228600">
+              <a:buFont typeface="Calibri"/>
               <a:spcAft>
                 <a:spcPts val="1000"/>
               </a:spcAft>
+              <a:buSzPct val="100000"/>
               <a:buChar char="•"/>
               <a:lnSpc>
                 <a:spcPts val="2200"/>
@@ -4764,10 +4784,12 @@
             </a:r>
           </a:p>
           <a:p>
-            <a:pPr>
+            <a:pPr lvl="0" marL="457200" indent="-228600">
+              <a:buFont typeface="Calibri"/>
               <a:spcAft>
                 <a:spcPts val="1000"/>
               </a:spcAft>
+              <a:buSzPct val="100000"/>
               <a:buChar char="•"/>
               <a:lnSpc>
                 <a:spcPts val="2200"/>
@@ -4903,10 +4925,12 @@
           </a:bodyPr>
           <a:lstStyle/>
           <a:p>
-            <a:pPr>
+            <a:pPr lvl="0" marL="457200" indent="-228600">
+              <a:buFont typeface="Calibri"/>
               <a:spcAft>
                 <a:spcPts val="1000"/>
               </a:spcAft>
+              <a:buSzPct val="100000"/>
               <a:buChar char="•"/>
               <a:lnSpc>
                 <a:spcPts val="2200"/>
@@ -4923,10 +4947,12 @@
             </a:r>
           </a:p>
           <a:p>
-            <a:pPr>
+            <a:pPr lvl="0" marL="457200" indent="-228600">
+              <a:buFont typeface="Calibri"/>
               <a:spcAft>
                 <a:spcPts val="1000"/>
               </a:spcAft>
+              <a:buSzPct val="100000"/>
               <a:buChar char="•"/>
               <a:lnSpc>
                 <a:spcPts val="2200"/>
@@ -4943,10 +4969,12 @@
             </a:r>
           </a:p>
           <a:p>
-            <a:pPr>
+            <a:pPr lvl="0" marL="457200" indent="-228600">
+              <a:buFont typeface="Calibri"/>
               <a:spcAft>
                 <a:spcPts val="1000"/>
               </a:spcAft>
+              <a:buSzPct val="100000"/>
               <a:buChar char="•"/>
               <a:lnSpc>
                 <a:spcPts val="2200"/>
@@ -4963,10 +4991,12 @@
             </a:r>
           </a:p>
           <a:p>
-            <a:pPr>
+            <a:pPr lvl="0" marL="457200" indent="-228600">
+              <a:buFont typeface="Calibri"/>
               <a:spcAft>
                 <a:spcPts val="1000"/>
               </a:spcAft>
+              <a:buSzPct val="100000"/>
               <a:buChar char="•"/>
               <a:lnSpc>
                 <a:spcPts val="2200"/>
@@ -4983,10 +5013,12 @@
             </a:r>
           </a:p>
           <a:p>
-            <a:pPr>
+            <a:pPr lvl="0" marL="457200" indent="-228600">
+              <a:buFont typeface="Calibri"/>
               <a:spcAft>
                 <a:spcPts val="1000"/>
               </a:spcAft>
+              <a:buSzPct val="100000"/>
               <a:buChar char="•"/>
               <a:lnSpc>
                 <a:spcPts val="2200"/>
@@ -5003,10 +5035,12 @@
             </a:r>
           </a:p>
           <a:p>
-            <a:pPr>
+            <a:pPr lvl="0" marL="457200" indent="-228600">
+              <a:buFont typeface="Calibri"/>
               <a:spcAft>
                 <a:spcPts val="1000"/>
               </a:spcAft>
+              <a:buSzPct val="100000"/>
               <a:buChar char="•"/>
               <a:lnSpc>
                 <a:spcPts val="2200"/>
@@ -5142,10 +5176,12 @@
           </a:bodyPr>
           <a:lstStyle/>
           <a:p>
-            <a:pPr>
+            <a:pPr lvl="0" marL="457200" indent="-228600">
+              <a:buFont typeface="Calibri"/>
               <a:spcAft>
                 <a:spcPts val="1000"/>
               </a:spcAft>
+              <a:buSzPct val="100000"/>
               <a:buChar char="•"/>
               <a:lnSpc>
                 <a:spcPts val="2200"/>
@@ -5162,10 +5198,12 @@
             </a:r>
           </a:p>
           <a:p>
-            <a:pPr>
+            <a:pPr lvl="0" marL="457200" indent="-228600">
+              <a:buFont typeface="Calibri"/>
               <a:spcAft>
                 <a:spcPts val="1000"/>
               </a:spcAft>
+              <a:buSzPct val="100000"/>
               <a:buChar char="•"/>
               <a:lnSpc>
                 <a:spcPts val="2200"/>
@@ -5182,10 +5220,12 @@
             </a:r>
           </a:p>
           <a:p>
-            <a:pPr>
+            <a:pPr lvl="0" marL="457200" indent="-228600">
+              <a:buFont typeface="Calibri"/>
               <a:spcAft>
                 <a:spcPts val="1000"/>
               </a:spcAft>
+              <a:buSzPct val="100000"/>
               <a:buChar char="•"/>
               <a:lnSpc>
                 <a:spcPts val="2200"/>
@@ -5202,10 +5242,12 @@
             </a:r>
           </a:p>
           <a:p>
-            <a:pPr>
+            <a:pPr lvl="0" marL="457200" indent="-228600">
+              <a:buFont typeface="Calibri"/>
               <a:spcAft>
                 <a:spcPts val="1000"/>
               </a:spcAft>
+              <a:buSzPct val="100000"/>
               <a:buChar char="•"/>
               <a:lnSpc>
                 <a:spcPts val="2200"/>
@@ -5222,10 +5264,12 @@
             </a:r>
           </a:p>
           <a:p>
-            <a:pPr>
+            <a:pPr lvl="0" marL="457200" indent="-228600">
+              <a:buFont typeface="Calibri"/>
               <a:spcAft>
                 <a:spcPts val="1000"/>
               </a:spcAft>
+              <a:buSzPct val="100000"/>
               <a:buChar char="•"/>
               <a:lnSpc>
                 <a:spcPts val="2200"/>
@@ -5242,10 +5286,12 @@
             </a:r>
           </a:p>
           <a:p>
-            <a:pPr>
+            <a:pPr lvl="0" marL="457200" indent="-228600">
+              <a:buFont typeface="Calibri"/>
               <a:spcAft>
                 <a:spcPts val="1000"/>
               </a:spcAft>
+              <a:buSzPct val="100000"/>
               <a:buChar char="•"/>
               <a:lnSpc>
                 <a:spcPts val="2200"/>
@@ -5381,10 +5427,12 @@
           </a:bodyPr>
           <a:lstStyle/>
           <a:p>
-            <a:pPr>
+            <a:pPr lvl="0" marL="457200" indent="-228600">
+              <a:buFont typeface="Calibri"/>
               <a:spcAft>
                 <a:spcPts val="1000"/>
               </a:spcAft>
+              <a:buSzPct val="100000"/>
               <a:buChar char="•"/>
               <a:lnSpc>
                 <a:spcPts val="2200"/>
@@ -5401,10 +5449,12 @@
             </a:r>
           </a:p>
           <a:p>
-            <a:pPr>
+            <a:pPr lvl="0" marL="457200" indent="-228600">
+              <a:buFont typeface="Calibri"/>
               <a:spcAft>
                 <a:spcPts val="1000"/>
               </a:spcAft>
+              <a:buSzPct val="100000"/>
               <a:buChar char="•"/>
               <a:lnSpc>
                 <a:spcPts val="2200"/>
@@ -5421,10 +5471,12 @@
             </a:r>
           </a:p>
           <a:p>
-            <a:pPr>
+            <a:pPr lvl="0" marL="457200" indent="-228600">
+              <a:buFont typeface="Calibri"/>
               <a:spcAft>
                 <a:spcPts val="1000"/>
               </a:spcAft>
+              <a:buSzPct val="100000"/>
               <a:buChar char="•"/>
               <a:lnSpc>
                 <a:spcPts val="2200"/>
@@ -5441,10 +5493,12 @@
             </a:r>
           </a:p>
           <a:p>
-            <a:pPr>
+            <a:pPr lvl="0" marL="457200" indent="-228600">
+              <a:buFont typeface="Calibri"/>
               <a:spcAft>
                 <a:spcPts val="1000"/>
               </a:spcAft>
+              <a:buSzPct val="100000"/>
               <a:buChar char="•"/>
               <a:lnSpc>
                 <a:spcPts val="2200"/>
@@ -5461,10 +5515,12 @@
             </a:r>
           </a:p>
           <a:p>
-            <a:pPr>
+            <a:pPr lvl="0" marL="457200" indent="-228600">
+              <a:buFont typeface="Calibri"/>
               <a:spcAft>
                 <a:spcPts val="1000"/>
               </a:spcAft>
+              <a:buSzPct val="100000"/>
               <a:buChar char="•"/>
               <a:lnSpc>
                 <a:spcPts val="2200"/>
@@ -5600,10 +5656,12 @@
           </a:bodyPr>
           <a:lstStyle/>
           <a:p>
-            <a:pPr>
+            <a:pPr lvl="0" marL="457200" indent="-228600">
+              <a:buFont typeface="Calibri"/>
               <a:spcAft>
                 <a:spcPts val="1000"/>
               </a:spcAft>
+              <a:buSzPct val="100000"/>
               <a:buChar char="•"/>
               <a:lnSpc>
                 <a:spcPts val="2200"/>
@@ -5620,10 +5678,12 @@
             </a:r>
           </a:p>
           <a:p>
-            <a:pPr>
+            <a:pPr lvl="0" marL="457200" indent="-228600">
+              <a:buFont typeface="Calibri"/>
               <a:spcAft>
                 <a:spcPts val="1000"/>
               </a:spcAft>
+              <a:buSzPct val="100000"/>
               <a:buChar char="•"/>
               <a:lnSpc>
                 <a:spcPts val="2200"/>
@@ -5640,10 +5700,12 @@
             </a:r>
           </a:p>
           <a:p>
-            <a:pPr>
+            <a:pPr lvl="0" marL="457200" indent="-228600">
+              <a:buFont typeface="Calibri"/>
               <a:spcAft>
                 <a:spcPts val="1000"/>
               </a:spcAft>
+              <a:buSzPct val="100000"/>
               <a:buChar char="•"/>
               <a:lnSpc>
                 <a:spcPts val="2200"/>
@@ -5660,10 +5722,12 @@
             </a:r>
           </a:p>
           <a:p>
-            <a:pPr>
+            <a:pPr lvl="0" marL="457200" indent="-228600">
+              <a:buFont typeface="Calibri"/>
               <a:spcAft>
                 <a:spcPts val="1000"/>
               </a:spcAft>
+              <a:buSzPct val="100000"/>
               <a:buChar char="•"/>
               <a:lnSpc>
                 <a:spcPts val="2200"/>
@@ -5680,10 +5744,12 @@
             </a:r>
           </a:p>
           <a:p>
-            <a:pPr>
+            <a:pPr lvl="0" marL="457200" indent="-228600">
+              <a:buFont typeface="Calibri"/>
               <a:spcAft>
                 <a:spcPts val="1000"/>
               </a:spcAft>
+              <a:buSzPct val="100000"/>
               <a:buChar char="•"/>
               <a:lnSpc>
                 <a:spcPts val="2200"/>
@@ -5700,10 +5766,12 @@
             </a:r>
           </a:p>
           <a:p>
-            <a:pPr>
+            <a:pPr lvl="0" marL="457200" indent="-228600">
+              <a:buFont typeface="Calibri"/>
               <a:spcAft>
                 <a:spcPts val="1000"/>
               </a:spcAft>
+              <a:buSzPct val="100000"/>
               <a:buChar char="•"/>
               <a:lnSpc>
                 <a:spcPts val="2200"/>
@@ -5839,10 +5907,12 @@
           </a:bodyPr>
           <a:lstStyle/>
           <a:p>
-            <a:pPr>
+            <a:pPr lvl="0" marL="457200" indent="-228600">
+              <a:buFont typeface="Calibri"/>
               <a:spcAft>
                 <a:spcPts val="1000"/>
               </a:spcAft>
+              <a:buSzPct val="100000"/>
               <a:buChar char="•"/>
               <a:lnSpc>
                 <a:spcPts val="2200"/>
@@ -5859,10 +5929,12 @@
             </a:r>
           </a:p>
           <a:p>
-            <a:pPr>
+            <a:pPr lvl="0" marL="457200" indent="-228600">
+              <a:buFont typeface="Calibri"/>
               <a:spcAft>
                 <a:spcPts val="1000"/>
               </a:spcAft>
+              <a:buSzPct val="100000"/>
               <a:buChar char="•"/>
               <a:lnSpc>
                 <a:spcPts val="2200"/>
@@ -5879,10 +5951,12 @@
             </a:r>
           </a:p>
           <a:p>
-            <a:pPr>
+            <a:pPr lvl="0" marL="457200" indent="-228600">
+              <a:buFont typeface="Calibri"/>
               <a:spcAft>
                 <a:spcPts val="1000"/>
               </a:spcAft>
+              <a:buSzPct val="100000"/>
               <a:buChar char="•"/>
               <a:lnSpc>
                 <a:spcPts val="2200"/>
@@ -5899,10 +5973,12 @@
             </a:r>
           </a:p>
           <a:p>
-            <a:pPr>
+            <a:pPr lvl="0" marL="457200" indent="-228600">
+              <a:buFont typeface="Calibri"/>
               <a:spcAft>
                 <a:spcPts val="1000"/>
               </a:spcAft>
+              <a:buSzPct val="100000"/>
               <a:buChar char="•"/>
               <a:lnSpc>
                 <a:spcPts val="2200"/>
@@ -5919,10 +5995,12 @@
             </a:r>
           </a:p>
           <a:p>
-            <a:pPr>
+            <a:pPr lvl="0" marL="457200" indent="-228600">
+              <a:buFont typeface="Calibri"/>
               <a:spcAft>
                 <a:spcPts val="1000"/>
               </a:spcAft>
+              <a:buSzPct val="100000"/>
               <a:buChar char="•"/>
               <a:lnSpc>
                 <a:spcPts val="2200"/>
@@ -5939,10 +6017,12 @@
             </a:r>
           </a:p>
           <a:p>
-            <a:pPr>
+            <a:pPr lvl="0" marL="457200" indent="-228600">
+              <a:buFont typeface="Calibri"/>
               <a:spcAft>
                 <a:spcPts val="1000"/>
               </a:spcAft>
+              <a:buSzPct val="100000"/>
               <a:buChar char="•"/>
               <a:lnSpc>
                 <a:spcPts val="2200"/>
@@ -6078,10 +6158,12 @@
           </a:bodyPr>
           <a:lstStyle/>
           <a:p>
-            <a:pPr>
+            <a:pPr lvl="0" marL="457200" indent="-228600">
+              <a:buFont typeface="Calibri"/>
               <a:spcAft>
                 <a:spcPts val="1000"/>
               </a:spcAft>
+              <a:buSzPct val="100000"/>
               <a:buChar char="•"/>
               <a:lnSpc>
                 <a:spcPts val="2200"/>
@@ -6098,10 +6180,12 @@
             </a:r>
           </a:p>
           <a:p>
-            <a:pPr>
+            <a:pPr lvl="0" marL="457200" indent="-228600">
+              <a:buFont typeface="Calibri"/>
               <a:spcAft>
                 <a:spcPts val="1000"/>
               </a:spcAft>
+              <a:buSzPct val="100000"/>
               <a:buChar char="•"/>
               <a:lnSpc>
                 <a:spcPts val="2200"/>
@@ -6118,10 +6202,12 @@
             </a:r>
           </a:p>
           <a:p>
-            <a:pPr>
+            <a:pPr lvl="0" marL="457200" indent="-228600">
+              <a:buFont typeface="Calibri"/>
               <a:spcAft>
                 <a:spcPts val="1000"/>
               </a:spcAft>
+              <a:buSzPct val="100000"/>
               <a:buChar char="•"/>
               <a:lnSpc>
                 <a:spcPts val="2200"/>
